--- a/slides/parallelism/2.1_understanding_parallelism.pptx
+++ b/slides/parallelism/2.1_understanding_parallelism.pptx
@@ -6709,13 +6709,18 @@
           <a:lstStyle/>
           <a:p>
             <a:r>
-              <a:rPr lang="en-US" b="1" dirty="0">
+              <a:rPr lang="en-US" b="1">
                 <a:solidFill>
                   <a:srgbClr val="002060"/>
                 </a:solidFill>
               </a:rPr>
-              <a:t>Mahmoud (Max) Parsian</a:t>
-            </a:r>
+              <a:t>Mahmoud Parsian</a:t>
+            </a:r>
+            <a:endParaRPr lang="en-US" b="1" dirty="0">
+              <a:solidFill>
+                <a:srgbClr val="002060"/>
+              </a:solidFill>
+            </a:endParaRPr>
           </a:p>
           <a:p>
             <a:r>

--- a/slides/parallelism/2.1_understanding_parallelism.pptx
+++ b/slides/parallelism/2.1_understanding_parallelism.pptx
@@ -6660,14 +6660,7 @@
             </a:br>
             <a:r>
               <a:rPr lang="en-US" dirty="0"/>
-              <a:t>Parallelism &amp;</a:t>
-            </a:r>
-            <a:br>
-              <a:rPr lang="en-US" dirty="0"/>
-            </a:br>
-            <a:r>
-              <a:rPr lang="en-US" dirty="0"/>
-              <a:t>Concurrency</a:t>
+              <a:t>Parallelism &amp; Concurrency</a:t>
             </a:r>
             <a:br>
               <a:rPr lang="en-US" dirty="0"/>
@@ -6699,32 +6692,27 @@
         <p:spPr>
           <a:xfrm>
             <a:off x="1524000" y="4442791"/>
-            <a:ext cx="9144000" cy="755373"/>
+            <a:ext cx="9144000" cy="945638"/>
           </a:xfrm>
         </p:spPr>
         <p:txBody>
           <a:bodyPr>
-            <a:normAutofit fontScale="92500" lnSpcReduction="10000"/>
+            <a:normAutofit/>
           </a:bodyPr>
           <a:lstStyle/>
           <a:p>
             <a:r>
-              <a:rPr lang="en-US" b="1">
+              <a:rPr lang="en-US" sz="2800" b="1" dirty="0">
                 <a:solidFill>
                   <a:srgbClr val="002060"/>
                 </a:solidFill>
               </a:rPr>
               <a:t>Mahmoud Parsian</a:t>
             </a:r>
-            <a:endParaRPr lang="en-US" b="1" dirty="0">
-              <a:solidFill>
-                <a:srgbClr val="002060"/>
-              </a:solidFill>
-            </a:endParaRPr>
-          </a:p>
-          <a:p>
-            <a:r>
-              <a:rPr lang="en-US" sz="1600" dirty="0">
+          </a:p>
+          <a:p>
+            <a:r>
+              <a:rPr lang="en-US" sz="1800" dirty="0">
                 <a:solidFill>
                   <a:srgbClr val="002060"/>
                 </a:solidFill>
